--- a/fixtures/sample-editor-60.pptx
+++ b/fixtures/sample-editor-60.pptx
@@ -6,6 +6,7 @@
   </p:sldMasterIdLst>
   <p:sldIdLst>
     <p:sldId id="256" r:id="rId2"/>
+    <p:sldId id="257" r:id="rId3"/>
   </p:sldIdLst>
   <p:sldSz cx="12192000" cy="6858000"/>
   <p:notesSz cx="6858000" cy="9144000"/>
@@ -1656,6 +1657,1591 @@
         </p:nvSpPr>
         <p:spPr>
           <a:xfrm>
+            <a:off x="10820400" y="5524500"/>
+            <a:ext cx="1066800" cy="857250"/>
+          </a:xfrm>
+          <a:prstGeom prst="rect">
+            <a:avLst/>
+          </a:prstGeom>
+          <a:solidFill>
+            <a:schemeClr val="accent6"/>
+          </a:solidFill>
+        </p:spPr>
+        <p:txBody>
+          <a:bodyPr anchor="ctr"/>
+          <a:lstStyle/>
+          <a:p>
+            <a:endParaRPr/>
+          </a:p>
+        </p:txBody>
+      </p:sp>
+    </p:spTree>
+  </p:cSld>
+  <p:clrMapOvr>
+    <a:masterClrMapping/>
+  </p:clrMapOvr>
+</p:sld>
+</file>
+
+<file path=ppt/slides/slide2.xml><?xml version="1.0" encoding="utf-8"?>
+<p:sld xmlns:a="http://schemas.openxmlformats.org/drawingml/2006/main" xmlns:r="http://schemas.openxmlformats.org/officeDocument/2006/relationships" xmlns:p="http://schemas.openxmlformats.org/presentationml/2006/main">
+  <p:cSld>
+    <p:spTree>
+      <p:nvGrpSpPr>
+        <p:cNvPr id="1" name=""/>
+        <p:cNvGrpSpPr/>
+        <p:nvPr/>
+      </p:nvGrpSpPr>
+      <p:grpSpPr>
+        <a:xfrm>
+          <a:off x="0" y="0"/>
+          <a:ext cx="0" cy="0"/>
+          <a:chOff x="0" y="0"/>
+          <a:chExt cx="0" cy="0"/>
+        </a:xfrm>
+      </p:grpSpPr>
+      <p:sp>
+        <p:nvSpPr>
+          <p:cNvPr id="161" name="性能形状 1"/>
+          <p:cNvSpPr/>
+          <p:nvPr/>
+        </p:nvSpPr>
+        <p:spPr>
+          <a:xfrm rot="2700000">
+            <a:off x="190500" y="190500"/>
+            <a:ext cx="1066800" cy="857250"/>
+          </a:xfrm>
+          <a:prstGeom prst="roundRect">
+            <a:avLst/>
+          </a:prstGeom>
+          <a:solidFill>
+            <a:schemeClr val="accent1"/>
+          </a:solidFill>
+        </p:spPr>
+        <p:txBody>
+          <a:bodyPr anchor="ctr"/>
+          <a:lstStyle/>
+          <a:p>
+            <a:endParaRPr/>
+          </a:p>
+        </p:txBody>
+      </p:sp>
+      <p:sp>
+        <p:nvSpPr>
+          <p:cNvPr id="162" name="性能形状 2"/>
+          <p:cNvSpPr/>
+          <p:nvPr/>
+        </p:nvSpPr>
+        <p:spPr>
+          <a:xfrm rot="2700000">
+            <a:off x="1371600" y="190500"/>
+            <a:ext cx="1066800" cy="857250"/>
+          </a:xfrm>
+          <a:prstGeom prst="rect">
+            <a:avLst/>
+          </a:prstGeom>
+          <a:solidFill>
+            <a:schemeClr val="accent2"/>
+          </a:solidFill>
+        </p:spPr>
+        <p:txBody>
+          <a:bodyPr anchor="ctr"/>
+          <a:lstStyle/>
+          <a:p>
+            <a:endParaRPr/>
+          </a:p>
+        </p:txBody>
+      </p:sp>
+      <p:sp>
+        <p:nvSpPr>
+          <p:cNvPr id="163" name="性能形状 3"/>
+          <p:cNvSpPr/>
+          <p:nvPr/>
+        </p:nvSpPr>
+        <p:spPr>
+          <a:xfrm rot="2700000">
+            <a:off x="2552700" y="190500"/>
+            <a:ext cx="1066800" cy="857250"/>
+          </a:xfrm>
+          <a:prstGeom prst="rect">
+            <a:avLst/>
+          </a:prstGeom>
+          <a:solidFill>
+            <a:schemeClr val="accent3"/>
+          </a:solidFill>
+        </p:spPr>
+        <p:txBody>
+          <a:bodyPr anchor="ctr"/>
+          <a:lstStyle/>
+          <a:p>
+            <a:endParaRPr/>
+          </a:p>
+        </p:txBody>
+      </p:sp>
+      <p:sp>
+        <p:nvSpPr>
+          <p:cNvPr id="164" name="性能形状 4"/>
+          <p:cNvSpPr/>
+          <p:nvPr/>
+        </p:nvSpPr>
+        <p:spPr>
+          <a:xfrm rot="2700000">
+            <a:off x="3733800" y="190500"/>
+            <a:ext cx="1066800" cy="857250"/>
+          </a:xfrm>
+          <a:prstGeom prst="roundRect">
+            <a:avLst/>
+          </a:prstGeom>
+          <a:solidFill>
+            <a:schemeClr val="accent4"/>
+          </a:solidFill>
+        </p:spPr>
+        <p:txBody>
+          <a:bodyPr anchor="ctr"/>
+          <a:lstStyle/>
+          <a:p>
+            <a:endParaRPr/>
+          </a:p>
+        </p:txBody>
+      </p:sp>
+      <p:sp>
+        <p:nvSpPr>
+          <p:cNvPr id="165" name="性能形状 5"/>
+          <p:cNvSpPr/>
+          <p:nvPr/>
+        </p:nvSpPr>
+        <p:spPr>
+          <a:xfrm rot="2700000">
+            <a:off x="4914900" y="190500"/>
+            <a:ext cx="1066800" cy="857250"/>
+          </a:xfrm>
+          <a:prstGeom prst="rect">
+            <a:avLst/>
+          </a:prstGeom>
+          <a:solidFill>
+            <a:schemeClr val="accent5"/>
+          </a:solidFill>
+        </p:spPr>
+        <p:txBody>
+          <a:bodyPr anchor="ctr"/>
+          <a:lstStyle/>
+          <a:p>
+            <a:endParaRPr/>
+          </a:p>
+        </p:txBody>
+      </p:sp>
+      <p:sp>
+        <p:nvSpPr>
+          <p:cNvPr id="166" name="性能形状 6"/>
+          <p:cNvSpPr/>
+          <p:nvPr/>
+        </p:nvSpPr>
+        <p:spPr>
+          <a:xfrm rot="2700000">
+            <a:off x="6096000" y="190500"/>
+            <a:ext cx="1066800" cy="857250"/>
+          </a:xfrm>
+          <a:prstGeom prst="rect">
+            <a:avLst/>
+          </a:prstGeom>
+          <a:solidFill>
+            <a:schemeClr val="accent6"/>
+          </a:solidFill>
+        </p:spPr>
+        <p:txBody>
+          <a:bodyPr anchor="ctr"/>
+          <a:lstStyle/>
+          <a:p>
+            <a:endParaRPr/>
+          </a:p>
+        </p:txBody>
+      </p:sp>
+      <p:sp>
+        <p:nvSpPr>
+          <p:cNvPr id="167" name="性能形状 7"/>
+          <p:cNvSpPr/>
+          <p:nvPr/>
+        </p:nvSpPr>
+        <p:spPr>
+          <a:xfrm rot="2700000">
+            <a:off x="7277100" y="190500"/>
+            <a:ext cx="1066800" cy="857250"/>
+          </a:xfrm>
+          <a:prstGeom prst="roundRect">
+            <a:avLst/>
+          </a:prstGeom>
+          <a:solidFill>
+            <a:schemeClr val="accent1"/>
+          </a:solidFill>
+        </p:spPr>
+        <p:txBody>
+          <a:bodyPr anchor="ctr"/>
+          <a:lstStyle/>
+          <a:p>
+            <a:endParaRPr/>
+          </a:p>
+        </p:txBody>
+      </p:sp>
+      <p:sp>
+        <p:nvSpPr>
+          <p:cNvPr id="168" name="性能形状 8"/>
+          <p:cNvSpPr/>
+          <p:nvPr/>
+        </p:nvSpPr>
+        <p:spPr>
+          <a:xfrm rot="2700000">
+            <a:off x="8458200" y="190500"/>
+            <a:ext cx="1066800" cy="857250"/>
+          </a:xfrm>
+          <a:prstGeom prst="rect">
+            <a:avLst/>
+          </a:prstGeom>
+          <a:solidFill>
+            <a:schemeClr val="accent2"/>
+          </a:solidFill>
+        </p:spPr>
+        <p:txBody>
+          <a:bodyPr anchor="ctr"/>
+          <a:lstStyle/>
+          <a:p>
+            <a:endParaRPr/>
+          </a:p>
+        </p:txBody>
+      </p:sp>
+      <p:sp>
+        <p:nvSpPr>
+          <p:cNvPr id="169" name="性能形状 9"/>
+          <p:cNvSpPr/>
+          <p:nvPr/>
+        </p:nvSpPr>
+        <p:spPr>
+          <a:xfrm rot="2700000">
+            <a:off x="9639300" y="190500"/>
+            <a:ext cx="1066800" cy="857250"/>
+          </a:xfrm>
+          <a:prstGeom prst="rect">
+            <a:avLst/>
+          </a:prstGeom>
+          <a:solidFill>
+            <a:schemeClr val="accent3"/>
+          </a:solidFill>
+        </p:spPr>
+        <p:txBody>
+          <a:bodyPr anchor="ctr"/>
+          <a:lstStyle/>
+          <a:p>
+            <a:endParaRPr/>
+          </a:p>
+        </p:txBody>
+      </p:sp>
+      <p:sp>
+        <p:nvSpPr>
+          <p:cNvPr id="170" name="性能形状 10"/>
+          <p:cNvSpPr/>
+          <p:nvPr/>
+        </p:nvSpPr>
+        <p:spPr>
+          <a:xfrm rot="2700000">
+            <a:off x="10820400" y="190500"/>
+            <a:ext cx="1066800" cy="857250"/>
+          </a:xfrm>
+          <a:prstGeom prst="roundRect">
+            <a:avLst/>
+          </a:prstGeom>
+          <a:solidFill>
+            <a:schemeClr val="accent4"/>
+          </a:solidFill>
+        </p:spPr>
+        <p:txBody>
+          <a:bodyPr anchor="ctr"/>
+          <a:lstStyle/>
+          <a:p>
+            <a:endParaRPr/>
+          </a:p>
+        </p:txBody>
+      </p:sp>
+      <p:sp>
+        <p:nvSpPr>
+          <p:cNvPr id="171" name="性能形状 11"/>
+          <p:cNvSpPr/>
+          <p:nvPr/>
+        </p:nvSpPr>
+        <p:spPr>
+          <a:xfrm rot="2700000">
+            <a:off x="190500" y="1257300"/>
+            <a:ext cx="1066800" cy="857250"/>
+          </a:xfrm>
+          <a:prstGeom prst="rect">
+            <a:avLst/>
+          </a:prstGeom>
+          <a:solidFill>
+            <a:schemeClr val="accent5"/>
+          </a:solidFill>
+        </p:spPr>
+        <p:txBody>
+          <a:bodyPr anchor="ctr"/>
+          <a:lstStyle/>
+          <a:p>
+            <a:endParaRPr/>
+          </a:p>
+        </p:txBody>
+      </p:sp>
+      <p:sp>
+        <p:nvSpPr>
+          <p:cNvPr id="172" name="性能形状 12"/>
+          <p:cNvSpPr/>
+          <p:nvPr/>
+        </p:nvSpPr>
+        <p:spPr>
+          <a:xfrm rot="2700000">
+            <a:off x="1371600" y="1257300"/>
+            <a:ext cx="1066800" cy="857250"/>
+          </a:xfrm>
+          <a:prstGeom prst="rect">
+            <a:avLst/>
+          </a:prstGeom>
+          <a:solidFill>
+            <a:schemeClr val="accent6"/>
+          </a:solidFill>
+        </p:spPr>
+        <p:txBody>
+          <a:bodyPr anchor="ctr"/>
+          <a:lstStyle/>
+          <a:p>
+            <a:endParaRPr/>
+          </a:p>
+        </p:txBody>
+      </p:sp>
+      <p:sp>
+        <p:nvSpPr>
+          <p:cNvPr id="173" name="性能形状 13"/>
+          <p:cNvSpPr/>
+          <p:nvPr/>
+        </p:nvSpPr>
+        <p:spPr>
+          <a:xfrm rot="2700000">
+            <a:off x="2552700" y="1257300"/>
+            <a:ext cx="1066800" cy="857250"/>
+          </a:xfrm>
+          <a:prstGeom prst="roundRect">
+            <a:avLst/>
+          </a:prstGeom>
+          <a:solidFill>
+            <a:schemeClr val="accent1"/>
+          </a:solidFill>
+        </p:spPr>
+        <p:txBody>
+          <a:bodyPr anchor="ctr"/>
+          <a:lstStyle/>
+          <a:p>
+            <a:endParaRPr/>
+          </a:p>
+        </p:txBody>
+      </p:sp>
+      <p:sp>
+        <p:nvSpPr>
+          <p:cNvPr id="174" name="性能形状 14"/>
+          <p:cNvSpPr/>
+          <p:nvPr/>
+        </p:nvSpPr>
+        <p:spPr>
+          <a:xfrm rot="2700000">
+            <a:off x="3733800" y="1257300"/>
+            <a:ext cx="1066800" cy="857250"/>
+          </a:xfrm>
+          <a:prstGeom prst="rect">
+            <a:avLst/>
+          </a:prstGeom>
+          <a:solidFill>
+            <a:schemeClr val="accent2"/>
+          </a:solidFill>
+        </p:spPr>
+        <p:txBody>
+          <a:bodyPr anchor="ctr"/>
+          <a:lstStyle/>
+          <a:p>
+            <a:endParaRPr/>
+          </a:p>
+        </p:txBody>
+      </p:sp>
+      <p:sp>
+        <p:nvSpPr>
+          <p:cNvPr id="175" name="性能形状 15"/>
+          <p:cNvSpPr/>
+          <p:nvPr/>
+        </p:nvSpPr>
+        <p:spPr>
+          <a:xfrm rot="2700000">
+            <a:off x="4914900" y="1257300"/>
+            <a:ext cx="1066800" cy="857250"/>
+          </a:xfrm>
+          <a:prstGeom prst="rect">
+            <a:avLst/>
+          </a:prstGeom>
+          <a:solidFill>
+            <a:schemeClr val="accent3"/>
+          </a:solidFill>
+        </p:spPr>
+        <p:txBody>
+          <a:bodyPr anchor="ctr"/>
+          <a:lstStyle/>
+          <a:p>
+            <a:endParaRPr/>
+          </a:p>
+        </p:txBody>
+      </p:sp>
+      <p:sp>
+        <p:nvSpPr>
+          <p:cNvPr id="176" name="性能形状 16"/>
+          <p:cNvSpPr/>
+          <p:nvPr/>
+        </p:nvSpPr>
+        <p:spPr>
+          <a:xfrm rot="2700000">
+            <a:off x="6096000" y="1257300"/>
+            <a:ext cx="1066800" cy="857250"/>
+          </a:xfrm>
+          <a:prstGeom prst="roundRect">
+            <a:avLst/>
+          </a:prstGeom>
+          <a:solidFill>
+            <a:schemeClr val="accent4"/>
+          </a:solidFill>
+        </p:spPr>
+        <p:txBody>
+          <a:bodyPr anchor="ctr"/>
+          <a:lstStyle/>
+          <a:p>
+            <a:endParaRPr/>
+          </a:p>
+        </p:txBody>
+      </p:sp>
+      <p:sp>
+        <p:nvSpPr>
+          <p:cNvPr id="177" name="性能形状 17"/>
+          <p:cNvSpPr/>
+          <p:nvPr/>
+        </p:nvSpPr>
+        <p:spPr>
+          <a:xfrm rot="2700000">
+            <a:off x="7277100" y="1257300"/>
+            <a:ext cx="1066800" cy="857250"/>
+          </a:xfrm>
+          <a:prstGeom prst="rect">
+            <a:avLst/>
+          </a:prstGeom>
+          <a:solidFill>
+            <a:schemeClr val="accent5"/>
+          </a:solidFill>
+        </p:spPr>
+        <p:txBody>
+          <a:bodyPr anchor="ctr"/>
+          <a:lstStyle/>
+          <a:p>
+            <a:endParaRPr/>
+          </a:p>
+        </p:txBody>
+      </p:sp>
+      <p:sp>
+        <p:nvSpPr>
+          <p:cNvPr id="178" name="性能形状 18"/>
+          <p:cNvSpPr/>
+          <p:nvPr/>
+        </p:nvSpPr>
+        <p:spPr>
+          <a:xfrm rot="2700000">
+            <a:off x="8458200" y="1257300"/>
+            <a:ext cx="1066800" cy="857250"/>
+          </a:xfrm>
+          <a:prstGeom prst="rect">
+            <a:avLst/>
+          </a:prstGeom>
+          <a:solidFill>
+            <a:schemeClr val="accent6"/>
+          </a:solidFill>
+        </p:spPr>
+        <p:txBody>
+          <a:bodyPr anchor="ctr"/>
+          <a:lstStyle/>
+          <a:p>
+            <a:endParaRPr/>
+          </a:p>
+        </p:txBody>
+      </p:sp>
+      <p:sp>
+        <p:nvSpPr>
+          <p:cNvPr id="179" name="性能形状 19"/>
+          <p:cNvSpPr/>
+          <p:nvPr/>
+        </p:nvSpPr>
+        <p:spPr>
+          <a:xfrm rot="2700000">
+            <a:off x="9639300" y="1257300"/>
+            <a:ext cx="1066800" cy="857250"/>
+          </a:xfrm>
+          <a:prstGeom prst="roundRect">
+            <a:avLst/>
+          </a:prstGeom>
+          <a:solidFill>
+            <a:schemeClr val="accent1"/>
+          </a:solidFill>
+        </p:spPr>
+        <p:txBody>
+          <a:bodyPr anchor="ctr"/>
+          <a:lstStyle/>
+          <a:p>
+            <a:endParaRPr/>
+          </a:p>
+        </p:txBody>
+      </p:sp>
+      <p:sp>
+        <p:nvSpPr>
+          <p:cNvPr id="180" name="性能形状 20"/>
+          <p:cNvSpPr/>
+          <p:nvPr/>
+        </p:nvSpPr>
+        <p:spPr>
+          <a:xfrm rot="2700000">
+            <a:off x="10820400" y="1257300"/>
+            <a:ext cx="1066800" cy="857250"/>
+          </a:xfrm>
+          <a:prstGeom prst="rect">
+            <a:avLst/>
+          </a:prstGeom>
+          <a:solidFill>
+            <a:schemeClr val="accent2"/>
+          </a:solidFill>
+        </p:spPr>
+        <p:txBody>
+          <a:bodyPr anchor="ctr"/>
+          <a:lstStyle/>
+          <a:p>
+            <a:endParaRPr/>
+          </a:p>
+        </p:txBody>
+      </p:sp>
+      <p:sp>
+        <p:nvSpPr>
+          <p:cNvPr id="181" name="性能形状 21"/>
+          <p:cNvSpPr/>
+          <p:nvPr/>
+        </p:nvSpPr>
+        <p:spPr>
+          <a:xfrm rot="2700000">
+            <a:off x="190500" y="2324100"/>
+            <a:ext cx="1066800" cy="857250"/>
+          </a:xfrm>
+          <a:prstGeom prst="rect">
+            <a:avLst/>
+          </a:prstGeom>
+          <a:solidFill>
+            <a:schemeClr val="accent3"/>
+          </a:solidFill>
+        </p:spPr>
+        <p:txBody>
+          <a:bodyPr anchor="ctr"/>
+          <a:lstStyle/>
+          <a:p>
+            <a:endParaRPr/>
+          </a:p>
+        </p:txBody>
+      </p:sp>
+      <p:sp>
+        <p:nvSpPr>
+          <p:cNvPr id="182" name="性能形状 22"/>
+          <p:cNvSpPr/>
+          <p:nvPr/>
+        </p:nvSpPr>
+        <p:spPr>
+          <a:xfrm rot="2700000">
+            <a:off x="1371600" y="2324100"/>
+            <a:ext cx="1066800" cy="857250"/>
+          </a:xfrm>
+          <a:prstGeom prst="roundRect">
+            <a:avLst/>
+          </a:prstGeom>
+          <a:solidFill>
+            <a:schemeClr val="accent4"/>
+          </a:solidFill>
+        </p:spPr>
+        <p:txBody>
+          <a:bodyPr anchor="ctr"/>
+          <a:lstStyle/>
+          <a:p>
+            <a:endParaRPr/>
+          </a:p>
+        </p:txBody>
+      </p:sp>
+      <p:sp>
+        <p:nvSpPr>
+          <p:cNvPr id="183" name="性能形状 23"/>
+          <p:cNvSpPr/>
+          <p:nvPr/>
+        </p:nvSpPr>
+        <p:spPr>
+          <a:xfrm rot="2700000">
+            <a:off x="2552700" y="2324100"/>
+            <a:ext cx="1066800" cy="857250"/>
+          </a:xfrm>
+          <a:prstGeom prst="rect">
+            <a:avLst/>
+          </a:prstGeom>
+          <a:solidFill>
+            <a:schemeClr val="accent5"/>
+          </a:solidFill>
+        </p:spPr>
+        <p:txBody>
+          <a:bodyPr anchor="ctr"/>
+          <a:lstStyle/>
+          <a:p>
+            <a:endParaRPr/>
+          </a:p>
+        </p:txBody>
+      </p:sp>
+      <p:sp>
+        <p:nvSpPr>
+          <p:cNvPr id="184" name="性能形状 24"/>
+          <p:cNvSpPr/>
+          <p:nvPr/>
+        </p:nvSpPr>
+        <p:spPr>
+          <a:xfrm rot="2700000">
+            <a:off x="3733800" y="2324100"/>
+            <a:ext cx="1066800" cy="857250"/>
+          </a:xfrm>
+          <a:prstGeom prst="rect">
+            <a:avLst/>
+          </a:prstGeom>
+          <a:solidFill>
+            <a:schemeClr val="accent6"/>
+          </a:solidFill>
+        </p:spPr>
+        <p:txBody>
+          <a:bodyPr anchor="ctr"/>
+          <a:lstStyle/>
+          <a:p>
+            <a:endParaRPr/>
+          </a:p>
+        </p:txBody>
+      </p:sp>
+      <p:sp>
+        <p:nvSpPr>
+          <p:cNvPr id="185" name="性能形状 25"/>
+          <p:cNvSpPr/>
+          <p:nvPr/>
+        </p:nvSpPr>
+        <p:spPr>
+          <a:xfrm rot="2700000">
+            <a:off x="4914900" y="2324100"/>
+            <a:ext cx="1066800" cy="857250"/>
+          </a:xfrm>
+          <a:prstGeom prst="roundRect">
+            <a:avLst/>
+          </a:prstGeom>
+          <a:solidFill>
+            <a:schemeClr val="accent1"/>
+          </a:solidFill>
+        </p:spPr>
+        <p:txBody>
+          <a:bodyPr anchor="ctr"/>
+          <a:lstStyle/>
+          <a:p>
+            <a:endParaRPr/>
+          </a:p>
+        </p:txBody>
+      </p:sp>
+      <p:sp>
+        <p:nvSpPr>
+          <p:cNvPr id="186" name="性能形状 26"/>
+          <p:cNvSpPr/>
+          <p:nvPr/>
+        </p:nvSpPr>
+        <p:spPr>
+          <a:xfrm rot="2700000">
+            <a:off x="6096000" y="2324100"/>
+            <a:ext cx="1066800" cy="857250"/>
+          </a:xfrm>
+          <a:prstGeom prst="rect">
+            <a:avLst/>
+          </a:prstGeom>
+          <a:solidFill>
+            <a:schemeClr val="accent2"/>
+          </a:solidFill>
+        </p:spPr>
+        <p:txBody>
+          <a:bodyPr anchor="ctr"/>
+          <a:lstStyle/>
+          <a:p>
+            <a:endParaRPr/>
+          </a:p>
+        </p:txBody>
+      </p:sp>
+      <p:sp>
+        <p:nvSpPr>
+          <p:cNvPr id="187" name="性能形状 27"/>
+          <p:cNvSpPr/>
+          <p:nvPr/>
+        </p:nvSpPr>
+        <p:spPr>
+          <a:xfrm rot="2700000">
+            <a:off x="7277100" y="2324100"/>
+            <a:ext cx="1066800" cy="857250"/>
+          </a:xfrm>
+          <a:prstGeom prst="rect">
+            <a:avLst/>
+          </a:prstGeom>
+          <a:solidFill>
+            <a:schemeClr val="accent3"/>
+          </a:solidFill>
+        </p:spPr>
+        <p:txBody>
+          <a:bodyPr anchor="ctr"/>
+          <a:lstStyle/>
+          <a:p>
+            <a:endParaRPr/>
+          </a:p>
+        </p:txBody>
+      </p:sp>
+      <p:sp>
+        <p:nvSpPr>
+          <p:cNvPr id="188" name="性能形状 28"/>
+          <p:cNvSpPr/>
+          <p:nvPr/>
+        </p:nvSpPr>
+        <p:spPr>
+          <a:xfrm rot="2700000">
+            <a:off x="8458200" y="2324100"/>
+            <a:ext cx="1066800" cy="857250"/>
+          </a:xfrm>
+          <a:prstGeom prst="roundRect">
+            <a:avLst/>
+          </a:prstGeom>
+          <a:solidFill>
+            <a:schemeClr val="accent4"/>
+          </a:solidFill>
+        </p:spPr>
+        <p:txBody>
+          <a:bodyPr anchor="ctr"/>
+          <a:lstStyle/>
+          <a:p>
+            <a:endParaRPr/>
+          </a:p>
+        </p:txBody>
+      </p:sp>
+      <p:sp>
+        <p:nvSpPr>
+          <p:cNvPr id="189" name="性能形状 29"/>
+          <p:cNvSpPr/>
+          <p:nvPr/>
+        </p:nvSpPr>
+        <p:spPr>
+          <a:xfrm rot="2700000">
+            <a:off x="9639300" y="2324100"/>
+            <a:ext cx="1066800" cy="857250"/>
+          </a:xfrm>
+          <a:prstGeom prst="rect">
+            <a:avLst/>
+          </a:prstGeom>
+          <a:solidFill>
+            <a:schemeClr val="accent5"/>
+          </a:solidFill>
+        </p:spPr>
+        <p:txBody>
+          <a:bodyPr anchor="ctr"/>
+          <a:lstStyle/>
+          <a:p>
+            <a:endParaRPr/>
+          </a:p>
+        </p:txBody>
+      </p:sp>
+      <p:sp>
+        <p:nvSpPr>
+          <p:cNvPr id="190" name="性能形状 30"/>
+          <p:cNvSpPr/>
+          <p:nvPr/>
+        </p:nvSpPr>
+        <p:spPr>
+          <a:xfrm rot="2700000">
+            <a:off x="10820400" y="2324100"/>
+            <a:ext cx="1066800" cy="857250"/>
+          </a:xfrm>
+          <a:prstGeom prst="rect">
+            <a:avLst/>
+          </a:prstGeom>
+          <a:solidFill>
+            <a:schemeClr val="accent6"/>
+          </a:solidFill>
+        </p:spPr>
+        <p:txBody>
+          <a:bodyPr anchor="ctr"/>
+          <a:lstStyle/>
+          <a:p>
+            <a:endParaRPr/>
+          </a:p>
+        </p:txBody>
+      </p:sp>
+      <p:sp>
+        <p:nvSpPr>
+          <p:cNvPr id="191" name="性能形状 31"/>
+          <p:cNvSpPr/>
+          <p:nvPr/>
+        </p:nvSpPr>
+        <p:spPr>
+          <a:xfrm rot="2700000">
+            <a:off x="190500" y="3390900"/>
+            <a:ext cx="1066800" cy="857250"/>
+          </a:xfrm>
+          <a:prstGeom prst="roundRect">
+            <a:avLst/>
+          </a:prstGeom>
+          <a:solidFill>
+            <a:schemeClr val="accent1"/>
+          </a:solidFill>
+        </p:spPr>
+        <p:txBody>
+          <a:bodyPr anchor="ctr"/>
+          <a:lstStyle/>
+          <a:p>
+            <a:endParaRPr/>
+          </a:p>
+        </p:txBody>
+      </p:sp>
+      <p:sp>
+        <p:nvSpPr>
+          <p:cNvPr id="192" name="性能形状 32"/>
+          <p:cNvSpPr/>
+          <p:nvPr/>
+        </p:nvSpPr>
+        <p:spPr>
+          <a:xfrm rot="2700000">
+            <a:off x="1371600" y="3390900"/>
+            <a:ext cx="1066800" cy="857250"/>
+          </a:xfrm>
+          <a:prstGeom prst="rect">
+            <a:avLst/>
+          </a:prstGeom>
+          <a:solidFill>
+            <a:schemeClr val="accent2"/>
+          </a:solidFill>
+        </p:spPr>
+        <p:txBody>
+          <a:bodyPr anchor="ctr"/>
+          <a:lstStyle/>
+          <a:p>
+            <a:endParaRPr/>
+          </a:p>
+        </p:txBody>
+      </p:sp>
+      <p:sp>
+        <p:nvSpPr>
+          <p:cNvPr id="193" name="性能形状 33"/>
+          <p:cNvSpPr/>
+          <p:nvPr/>
+        </p:nvSpPr>
+        <p:spPr>
+          <a:xfrm rot="2700000">
+            <a:off x="2552700" y="3390900"/>
+            <a:ext cx="1066800" cy="857250"/>
+          </a:xfrm>
+          <a:prstGeom prst="rect">
+            <a:avLst/>
+          </a:prstGeom>
+          <a:solidFill>
+            <a:schemeClr val="accent3"/>
+          </a:solidFill>
+        </p:spPr>
+        <p:txBody>
+          <a:bodyPr anchor="ctr"/>
+          <a:lstStyle/>
+          <a:p>
+            <a:endParaRPr/>
+          </a:p>
+        </p:txBody>
+      </p:sp>
+      <p:sp>
+        <p:nvSpPr>
+          <p:cNvPr id="194" name="性能形状 34"/>
+          <p:cNvSpPr/>
+          <p:nvPr/>
+        </p:nvSpPr>
+        <p:spPr>
+          <a:xfrm rot="2700000">
+            <a:off x="3733800" y="3390900"/>
+            <a:ext cx="1066800" cy="857250"/>
+          </a:xfrm>
+          <a:prstGeom prst="roundRect">
+            <a:avLst/>
+          </a:prstGeom>
+          <a:solidFill>
+            <a:schemeClr val="accent4"/>
+          </a:solidFill>
+        </p:spPr>
+        <p:txBody>
+          <a:bodyPr anchor="ctr"/>
+          <a:lstStyle/>
+          <a:p>
+            <a:endParaRPr/>
+          </a:p>
+        </p:txBody>
+      </p:sp>
+      <p:sp>
+        <p:nvSpPr>
+          <p:cNvPr id="195" name="性能形状 35"/>
+          <p:cNvSpPr/>
+          <p:nvPr/>
+        </p:nvSpPr>
+        <p:spPr>
+          <a:xfrm rot="2700000">
+            <a:off x="4914900" y="3390900"/>
+            <a:ext cx="1066800" cy="857250"/>
+          </a:xfrm>
+          <a:prstGeom prst="rect">
+            <a:avLst/>
+          </a:prstGeom>
+          <a:solidFill>
+            <a:schemeClr val="accent5"/>
+          </a:solidFill>
+        </p:spPr>
+        <p:txBody>
+          <a:bodyPr anchor="ctr"/>
+          <a:lstStyle/>
+          <a:p>
+            <a:endParaRPr/>
+          </a:p>
+        </p:txBody>
+      </p:sp>
+      <p:sp>
+        <p:nvSpPr>
+          <p:cNvPr id="196" name="性能形状 36"/>
+          <p:cNvSpPr/>
+          <p:nvPr/>
+        </p:nvSpPr>
+        <p:spPr>
+          <a:xfrm rot="2700000">
+            <a:off x="6096000" y="3390900"/>
+            <a:ext cx="1066800" cy="857250"/>
+          </a:xfrm>
+          <a:prstGeom prst="rect">
+            <a:avLst/>
+          </a:prstGeom>
+          <a:solidFill>
+            <a:schemeClr val="accent6"/>
+          </a:solidFill>
+        </p:spPr>
+        <p:txBody>
+          <a:bodyPr anchor="ctr"/>
+          <a:lstStyle/>
+          <a:p>
+            <a:endParaRPr/>
+          </a:p>
+        </p:txBody>
+      </p:sp>
+      <p:sp>
+        <p:nvSpPr>
+          <p:cNvPr id="197" name="性能形状 37"/>
+          <p:cNvSpPr/>
+          <p:nvPr/>
+        </p:nvSpPr>
+        <p:spPr>
+          <a:xfrm rot="2700000">
+            <a:off x="7277100" y="3390900"/>
+            <a:ext cx="1066800" cy="857250"/>
+          </a:xfrm>
+          <a:prstGeom prst="roundRect">
+            <a:avLst/>
+          </a:prstGeom>
+          <a:solidFill>
+            <a:schemeClr val="accent1"/>
+          </a:solidFill>
+        </p:spPr>
+        <p:txBody>
+          <a:bodyPr anchor="ctr"/>
+          <a:lstStyle/>
+          <a:p>
+            <a:endParaRPr/>
+          </a:p>
+        </p:txBody>
+      </p:sp>
+      <p:sp>
+        <p:nvSpPr>
+          <p:cNvPr id="198" name="性能形状 38"/>
+          <p:cNvSpPr/>
+          <p:nvPr/>
+        </p:nvSpPr>
+        <p:spPr>
+          <a:xfrm rot="2700000">
+            <a:off x="8458200" y="3390900"/>
+            <a:ext cx="1066800" cy="857250"/>
+          </a:xfrm>
+          <a:prstGeom prst="rect">
+            <a:avLst/>
+          </a:prstGeom>
+          <a:solidFill>
+            <a:schemeClr val="accent2"/>
+          </a:solidFill>
+        </p:spPr>
+        <p:txBody>
+          <a:bodyPr anchor="ctr"/>
+          <a:lstStyle/>
+          <a:p>
+            <a:endParaRPr/>
+          </a:p>
+        </p:txBody>
+      </p:sp>
+      <p:sp>
+        <p:nvSpPr>
+          <p:cNvPr id="199" name="性能形状 39"/>
+          <p:cNvSpPr/>
+          <p:nvPr/>
+        </p:nvSpPr>
+        <p:spPr>
+          <a:xfrm rot="2700000">
+            <a:off x="9639300" y="3390900"/>
+            <a:ext cx="1066800" cy="857250"/>
+          </a:xfrm>
+          <a:prstGeom prst="rect">
+            <a:avLst/>
+          </a:prstGeom>
+          <a:solidFill>
+            <a:schemeClr val="accent3"/>
+          </a:solidFill>
+        </p:spPr>
+        <p:txBody>
+          <a:bodyPr anchor="ctr"/>
+          <a:lstStyle/>
+          <a:p>
+            <a:endParaRPr/>
+          </a:p>
+        </p:txBody>
+      </p:sp>
+      <p:sp>
+        <p:nvSpPr>
+          <p:cNvPr id="200" name="性能形状 40"/>
+          <p:cNvSpPr/>
+          <p:nvPr/>
+        </p:nvSpPr>
+        <p:spPr>
+          <a:xfrm rot="2700000">
+            <a:off x="10820400" y="3390900"/>
+            <a:ext cx="1066800" cy="857250"/>
+          </a:xfrm>
+          <a:prstGeom prst="roundRect">
+            <a:avLst/>
+          </a:prstGeom>
+          <a:solidFill>
+            <a:schemeClr val="accent4"/>
+          </a:solidFill>
+        </p:spPr>
+        <p:txBody>
+          <a:bodyPr anchor="ctr"/>
+          <a:lstStyle/>
+          <a:p>
+            <a:endParaRPr/>
+          </a:p>
+        </p:txBody>
+      </p:sp>
+      <p:sp>
+        <p:nvSpPr>
+          <p:cNvPr id="201" name="性能形状 41"/>
+          <p:cNvSpPr/>
+          <p:nvPr/>
+        </p:nvSpPr>
+        <p:spPr>
+          <a:xfrm rot="2700000">
+            <a:off x="190500" y="4457700"/>
+            <a:ext cx="1066800" cy="857250"/>
+          </a:xfrm>
+          <a:prstGeom prst="rect">
+            <a:avLst/>
+          </a:prstGeom>
+          <a:solidFill>
+            <a:schemeClr val="accent5"/>
+          </a:solidFill>
+        </p:spPr>
+        <p:txBody>
+          <a:bodyPr anchor="ctr"/>
+          <a:lstStyle/>
+          <a:p>
+            <a:endParaRPr/>
+          </a:p>
+        </p:txBody>
+      </p:sp>
+      <p:sp>
+        <p:nvSpPr>
+          <p:cNvPr id="202" name="性能形状 42"/>
+          <p:cNvSpPr/>
+          <p:nvPr/>
+        </p:nvSpPr>
+        <p:spPr>
+          <a:xfrm rot="2700000">
+            <a:off x="1371600" y="4457700"/>
+            <a:ext cx="1066800" cy="857250"/>
+          </a:xfrm>
+          <a:prstGeom prst="rect">
+            <a:avLst/>
+          </a:prstGeom>
+          <a:solidFill>
+            <a:schemeClr val="accent6"/>
+          </a:solidFill>
+        </p:spPr>
+        <p:txBody>
+          <a:bodyPr anchor="ctr"/>
+          <a:lstStyle/>
+          <a:p>
+            <a:endParaRPr/>
+          </a:p>
+        </p:txBody>
+      </p:sp>
+      <p:sp>
+        <p:nvSpPr>
+          <p:cNvPr id="203" name="性能形状 43"/>
+          <p:cNvSpPr/>
+          <p:nvPr/>
+        </p:nvSpPr>
+        <p:spPr>
+          <a:xfrm rot="2700000">
+            <a:off x="2552700" y="4457700"/>
+            <a:ext cx="1066800" cy="857250"/>
+          </a:xfrm>
+          <a:prstGeom prst="roundRect">
+            <a:avLst/>
+          </a:prstGeom>
+          <a:solidFill>
+            <a:schemeClr val="accent1"/>
+          </a:solidFill>
+        </p:spPr>
+        <p:txBody>
+          <a:bodyPr anchor="ctr"/>
+          <a:lstStyle/>
+          <a:p>
+            <a:endParaRPr/>
+          </a:p>
+        </p:txBody>
+      </p:sp>
+      <p:sp>
+        <p:nvSpPr>
+          <p:cNvPr id="204" name="性能形状 44"/>
+          <p:cNvSpPr/>
+          <p:nvPr/>
+        </p:nvSpPr>
+        <p:spPr>
+          <a:xfrm rot="2700000">
+            <a:off x="3733800" y="4457700"/>
+            <a:ext cx="1066800" cy="857250"/>
+          </a:xfrm>
+          <a:prstGeom prst="rect">
+            <a:avLst/>
+          </a:prstGeom>
+          <a:solidFill>
+            <a:schemeClr val="accent2"/>
+          </a:solidFill>
+        </p:spPr>
+        <p:txBody>
+          <a:bodyPr anchor="ctr"/>
+          <a:lstStyle/>
+          <a:p>
+            <a:endParaRPr/>
+          </a:p>
+        </p:txBody>
+      </p:sp>
+      <p:sp>
+        <p:nvSpPr>
+          <p:cNvPr id="205" name="性能形状 45"/>
+          <p:cNvSpPr/>
+          <p:nvPr/>
+        </p:nvSpPr>
+        <p:spPr>
+          <a:xfrm rot="2700000">
+            <a:off x="4914900" y="4457700"/>
+            <a:ext cx="1066800" cy="857250"/>
+          </a:xfrm>
+          <a:prstGeom prst="rect">
+            <a:avLst/>
+          </a:prstGeom>
+          <a:solidFill>
+            <a:schemeClr val="accent3"/>
+          </a:solidFill>
+        </p:spPr>
+        <p:txBody>
+          <a:bodyPr anchor="ctr"/>
+          <a:lstStyle/>
+          <a:p>
+            <a:endParaRPr/>
+          </a:p>
+        </p:txBody>
+      </p:sp>
+      <p:sp>
+        <p:nvSpPr>
+          <p:cNvPr id="206" name="性能形状 46"/>
+          <p:cNvSpPr/>
+          <p:nvPr/>
+        </p:nvSpPr>
+        <p:spPr>
+          <a:xfrm rot="2700000">
+            <a:off x="6096000" y="4457700"/>
+            <a:ext cx="1066800" cy="857250"/>
+          </a:xfrm>
+          <a:prstGeom prst="roundRect">
+            <a:avLst/>
+          </a:prstGeom>
+          <a:solidFill>
+            <a:schemeClr val="accent4"/>
+          </a:solidFill>
+        </p:spPr>
+        <p:txBody>
+          <a:bodyPr anchor="ctr"/>
+          <a:lstStyle/>
+          <a:p>
+            <a:endParaRPr/>
+          </a:p>
+        </p:txBody>
+      </p:sp>
+      <p:sp>
+        <p:nvSpPr>
+          <p:cNvPr id="207" name="性能形状 47"/>
+          <p:cNvSpPr/>
+          <p:nvPr/>
+        </p:nvSpPr>
+        <p:spPr>
+          <a:xfrm rot="2700000">
+            <a:off x="7277100" y="4457700"/>
+            <a:ext cx="1066800" cy="857250"/>
+          </a:xfrm>
+          <a:prstGeom prst="rect">
+            <a:avLst/>
+          </a:prstGeom>
+          <a:solidFill>
+            <a:schemeClr val="accent5"/>
+          </a:solidFill>
+        </p:spPr>
+        <p:txBody>
+          <a:bodyPr anchor="ctr"/>
+          <a:lstStyle/>
+          <a:p>
+            <a:endParaRPr/>
+          </a:p>
+        </p:txBody>
+      </p:sp>
+      <p:sp>
+        <p:nvSpPr>
+          <p:cNvPr id="208" name="性能形状 48"/>
+          <p:cNvSpPr/>
+          <p:nvPr/>
+        </p:nvSpPr>
+        <p:spPr>
+          <a:xfrm rot="2700000">
+            <a:off x="8458200" y="4457700"/>
+            <a:ext cx="1066800" cy="857250"/>
+          </a:xfrm>
+          <a:prstGeom prst="rect">
+            <a:avLst/>
+          </a:prstGeom>
+          <a:solidFill>
+            <a:schemeClr val="accent6"/>
+          </a:solidFill>
+        </p:spPr>
+        <p:txBody>
+          <a:bodyPr anchor="ctr"/>
+          <a:lstStyle/>
+          <a:p>
+            <a:endParaRPr/>
+          </a:p>
+        </p:txBody>
+      </p:sp>
+      <p:sp>
+        <p:nvSpPr>
+          <p:cNvPr id="209" name="性能形状 49"/>
+          <p:cNvSpPr/>
+          <p:nvPr/>
+        </p:nvSpPr>
+        <p:spPr>
+          <a:xfrm rot="2700000">
+            <a:off x="9639300" y="4457700"/>
+            <a:ext cx="1066800" cy="857250"/>
+          </a:xfrm>
+          <a:prstGeom prst="roundRect">
+            <a:avLst/>
+          </a:prstGeom>
+          <a:solidFill>
+            <a:schemeClr val="accent1"/>
+          </a:solidFill>
+        </p:spPr>
+        <p:txBody>
+          <a:bodyPr anchor="ctr"/>
+          <a:lstStyle/>
+          <a:p>
+            <a:endParaRPr/>
+          </a:p>
+        </p:txBody>
+      </p:sp>
+      <p:sp>
+        <p:nvSpPr>
+          <p:cNvPr id="210" name="性能形状 50"/>
+          <p:cNvSpPr/>
+          <p:nvPr/>
+        </p:nvSpPr>
+        <p:spPr>
+          <a:xfrm rot="2700000">
+            <a:off x="10820400" y="4457700"/>
+            <a:ext cx="1066800" cy="857250"/>
+          </a:xfrm>
+          <a:prstGeom prst="rect">
+            <a:avLst/>
+          </a:prstGeom>
+          <a:solidFill>
+            <a:schemeClr val="accent2"/>
+          </a:solidFill>
+        </p:spPr>
+        <p:txBody>
+          <a:bodyPr anchor="ctr"/>
+          <a:lstStyle/>
+          <a:p>
+            <a:endParaRPr/>
+          </a:p>
+        </p:txBody>
+      </p:sp>
+      <p:sp>
+        <p:nvSpPr>
+          <p:cNvPr id="211" name="性能形状 51"/>
+          <p:cNvSpPr/>
+          <p:nvPr/>
+        </p:nvSpPr>
+        <p:spPr>
+          <a:xfrm rot="2700000">
+            <a:off x="190500" y="5524500"/>
+            <a:ext cx="1066800" cy="857250"/>
+          </a:xfrm>
+          <a:prstGeom prst="rect">
+            <a:avLst/>
+          </a:prstGeom>
+          <a:solidFill>
+            <a:schemeClr val="accent3"/>
+          </a:solidFill>
+        </p:spPr>
+        <p:txBody>
+          <a:bodyPr anchor="ctr"/>
+          <a:lstStyle/>
+          <a:p>
+            <a:endParaRPr/>
+          </a:p>
+        </p:txBody>
+      </p:sp>
+      <p:sp>
+        <p:nvSpPr>
+          <p:cNvPr id="212" name="性能形状 52"/>
+          <p:cNvSpPr/>
+          <p:nvPr/>
+        </p:nvSpPr>
+        <p:spPr>
+          <a:xfrm rot="2700000">
+            <a:off x="1371600" y="5524500"/>
+            <a:ext cx="1066800" cy="857250"/>
+          </a:xfrm>
+          <a:prstGeom prst="roundRect">
+            <a:avLst/>
+          </a:prstGeom>
+          <a:solidFill>
+            <a:schemeClr val="accent4"/>
+          </a:solidFill>
+        </p:spPr>
+        <p:txBody>
+          <a:bodyPr anchor="ctr"/>
+          <a:lstStyle/>
+          <a:p>
+            <a:endParaRPr/>
+          </a:p>
+        </p:txBody>
+      </p:sp>
+      <p:sp>
+        <p:nvSpPr>
+          <p:cNvPr id="213" name="性能形状 53"/>
+          <p:cNvSpPr/>
+          <p:nvPr/>
+        </p:nvSpPr>
+        <p:spPr>
+          <a:xfrm rot="2700000">
+            <a:off x="2552700" y="5524500"/>
+            <a:ext cx="1066800" cy="857250"/>
+          </a:xfrm>
+          <a:prstGeom prst="rect">
+            <a:avLst/>
+          </a:prstGeom>
+          <a:solidFill>
+            <a:schemeClr val="accent5"/>
+          </a:solidFill>
+        </p:spPr>
+        <p:txBody>
+          <a:bodyPr anchor="ctr"/>
+          <a:lstStyle/>
+          <a:p>
+            <a:endParaRPr/>
+          </a:p>
+        </p:txBody>
+      </p:sp>
+      <p:sp>
+        <p:nvSpPr>
+          <p:cNvPr id="214" name="性能形状 54"/>
+          <p:cNvSpPr/>
+          <p:nvPr/>
+        </p:nvSpPr>
+        <p:spPr>
+          <a:xfrm rot="2700000">
+            <a:off x="3733800" y="5524500"/>
+            <a:ext cx="1066800" cy="857250"/>
+          </a:xfrm>
+          <a:prstGeom prst="rect">
+            <a:avLst/>
+          </a:prstGeom>
+          <a:solidFill>
+            <a:schemeClr val="accent6"/>
+          </a:solidFill>
+        </p:spPr>
+        <p:txBody>
+          <a:bodyPr anchor="ctr"/>
+          <a:lstStyle/>
+          <a:p>
+            <a:endParaRPr/>
+          </a:p>
+        </p:txBody>
+      </p:sp>
+      <p:sp>
+        <p:nvSpPr>
+          <p:cNvPr id="215" name="性能形状 55"/>
+          <p:cNvSpPr/>
+          <p:nvPr/>
+        </p:nvSpPr>
+        <p:spPr>
+          <a:xfrm rot="2700000">
+            <a:off x="4914900" y="5524500"/>
+            <a:ext cx="1066800" cy="857250"/>
+          </a:xfrm>
+          <a:prstGeom prst="roundRect">
+            <a:avLst/>
+          </a:prstGeom>
+          <a:solidFill>
+            <a:schemeClr val="accent1"/>
+          </a:solidFill>
+        </p:spPr>
+        <p:txBody>
+          <a:bodyPr anchor="ctr"/>
+          <a:lstStyle/>
+          <a:p>
+            <a:endParaRPr/>
+          </a:p>
+        </p:txBody>
+      </p:sp>
+      <p:sp>
+        <p:nvSpPr>
+          <p:cNvPr id="216" name="性能形状 56"/>
+          <p:cNvSpPr/>
+          <p:nvPr/>
+        </p:nvSpPr>
+        <p:spPr>
+          <a:xfrm rot="2700000">
+            <a:off x="6096000" y="5524500"/>
+            <a:ext cx="1066800" cy="857250"/>
+          </a:xfrm>
+          <a:prstGeom prst="rect">
+            <a:avLst/>
+          </a:prstGeom>
+          <a:solidFill>
+            <a:schemeClr val="accent2"/>
+          </a:solidFill>
+        </p:spPr>
+        <p:txBody>
+          <a:bodyPr anchor="ctr"/>
+          <a:lstStyle/>
+          <a:p>
+            <a:endParaRPr/>
+          </a:p>
+        </p:txBody>
+      </p:sp>
+      <p:sp>
+        <p:nvSpPr>
+          <p:cNvPr id="217" name="性能形状 57"/>
+          <p:cNvSpPr/>
+          <p:nvPr/>
+        </p:nvSpPr>
+        <p:spPr>
+          <a:xfrm rot="2700000">
+            <a:off x="7277100" y="5524500"/>
+            <a:ext cx="1066800" cy="857250"/>
+          </a:xfrm>
+          <a:prstGeom prst="rect">
+            <a:avLst/>
+          </a:prstGeom>
+          <a:solidFill>
+            <a:schemeClr val="accent3"/>
+          </a:solidFill>
+        </p:spPr>
+        <p:txBody>
+          <a:bodyPr anchor="ctr"/>
+          <a:lstStyle/>
+          <a:p>
+            <a:endParaRPr/>
+          </a:p>
+        </p:txBody>
+      </p:sp>
+      <p:sp>
+        <p:nvSpPr>
+          <p:cNvPr id="218" name="性能形状 58"/>
+          <p:cNvSpPr/>
+          <p:nvPr/>
+        </p:nvSpPr>
+        <p:spPr>
+          <a:xfrm rot="2700000">
+            <a:off x="8458200" y="5524500"/>
+            <a:ext cx="1066800" cy="857250"/>
+          </a:xfrm>
+          <a:prstGeom prst="roundRect">
+            <a:avLst/>
+          </a:prstGeom>
+          <a:solidFill>
+            <a:schemeClr val="accent4"/>
+          </a:solidFill>
+        </p:spPr>
+        <p:txBody>
+          <a:bodyPr anchor="ctr"/>
+          <a:lstStyle/>
+          <a:p>
+            <a:endParaRPr/>
+          </a:p>
+        </p:txBody>
+      </p:sp>
+      <p:sp>
+        <p:nvSpPr>
+          <p:cNvPr id="219" name="性能形状 59"/>
+          <p:cNvSpPr/>
+          <p:nvPr/>
+        </p:nvSpPr>
+        <p:spPr>
+          <a:xfrm rot="2700000">
+            <a:off x="9639300" y="5524500"/>
+            <a:ext cx="1066800" cy="857250"/>
+          </a:xfrm>
+          <a:prstGeom prst="rect">
+            <a:avLst/>
+          </a:prstGeom>
+          <a:solidFill>
+            <a:schemeClr val="accent5"/>
+          </a:solidFill>
+        </p:spPr>
+        <p:txBody>
+          <a:bodyPr anchor="ctr"/>
+          <a:lstStyle/>
+          <a:p>
+            <a:endParaRPr/>
+          </a:p>
+        </p:txBody>
+      </p:sp>
+      <p:sp>
+        <p:nvSpPr>
+          <p:cNvPr id="220" name="性能形状 60"/>
+          <p:cNvSpPr/>
+          <p:nvPr/>
+        </p:nvSpPr>
+        <p:spPr>
+          <a:xfrm rot="2700000">
             <a:off x="10820400" y="5524500"/>
             <a:ext cx="1066800" cy="857250"/>
           </a:xfrm>
